--- a/classes/parte-7-red-team-y-operaciones-ofensivas/178-purple-teaming/clase-178-presentacion.pptx
+++ b/classes/parte-7-red-team-y-operaciones-ofensivas/178-purple-teaming/clase-178-presentacion.pptx
@@ -17,6 +17,9 @@
     <p:sldId id="265" r:id="rId16"/>
     <p:sldId id="266" r:id="rId17"/>
     <p:sldId id="267" r:id="rId18"/>
+    <p:sldId id="268" r:id="rId19"/>
+    <p:sldId id="269" r:id="rId20"/>
+    <p:sldId id="270" r:id="rId21"/>
   </p:sldIdLst>
   <p:sldSz cx="9144000" cy="6858000" type="screen4x3"/>
   <p:notesSz cx="6858000" cy="9144000"/>
@@ -3198,7 +3201,7 @@
                   <a:srgbClr val="0B3D2E"/>
                 </a:solidFill>
               </a:rPr>
-              <a:t>⚠️ Errores comunes</a:t>
+              <a:t>✍️ Ejercicios</a:t>
             </a:r>
           </a:p>
         </p:txBody>
@@ -3236,67 +3239,82 @@
                   <a:srgbClr val="22282E"/>
                 </a:solidFill>
               </a:rPr>
-              <a:t>•  No llegan eventos al SIEM — Sysmon/forwarder mal configurado; valida el pipeline primero</a:t>
-            </a:r>
-          </a:p>
-          <a:p>
-            <a:pPr>
-              <a:spcAft>
-                <a:spcPts val="600"/>
-              </a:spcAft>
-            </a:pPr>
-            <a:r>
-              <a:rPr sz="1500">
-                <a:solidFill>
-                  <a:srgbClr val="22282E"/>
-                </a:solidFill>
-              </a:rPr>
-              <a:t>•  La regla no dispara — Campo/etype equivocado; inspecciona el evento crudo antes de escribir la regla</a:t>
-            </a:r>
-          </a:p>
-          <a:p>
-            <a:pPr>
-              <a:spcAft>
-                <a:spcPts val="600"/>
-              </a:spcAft>
-            </a:pPr>
-            <a:r>
-              <a:rPr sz="1500">
-                <a:solidFill>
-                  <a:srgbClr val="22282E"/>
-                </a:solidFill>
-              </a:rPr>
-              <a:t>•  Muchos falsos positivos — Regla demasiado amplia; añade umbrales y contexto</a:t>
-            </a:r>
-          </a:p>
-          <a:p>
-            <a:pPr>
-              <a:spcAft>
-                <a:spcPts val="600"/>
-              </a:spcAft>
-            </a:pPr>
-            <a:r>
-              <a:rPr sz="1500">
-                <a:solidFill>
-                  <a:srgbClr val="22282E"/>
-                </a:solidFill>
-              </a:rPr>
-              <a:t>•  Cobertura inflada — Marcaste "detectado" sin verificar; exige reejecución que confirme</a:t>
-            </a:r>
-          </a:p>
-          <a:p>
-            <a:pPr>
-              <a:spcAft>
-                <a:spcPts val="600"/>
-              </a:spcAft>
-            </a:pPr>
-            <a:r>
-              <a:rPr sz="1500">
-                <a:solidFill>
-                  <a:srgbClr val="22282E"/>
-                </a:solidFill>
-              </a:rPr>
-              <a:t>•  Red y Blue no coordinan — Falta agenda del ciclo; define quién ejecuta y quién observa cada TTP</a:t>
+              <a:t>•  Explica el ciclo purple con un diagrama.</a:t>
+            </a:r>
+          </a:p>
+          <a:p>
+            <a:pPr>
+              <a:spcAft>
+                <a:spcPts val="600"/>
+              </a:spcAft>
+            </a:pPr>
+            <a:r>
+              <a:rPr sz="1500">
+                <a:solidFill>
+                  <a:srgbClr val="22282E"/>
+                </a:solidFill>
+              </a:rPr>
+              <a:t>•  Ejecuta un ciclo purple completo sobre Pass-the-Hash.</a:t>
+            </a:r>
+          </a:p>
+          <a:p>
+            <a:pPr>
+              <a:spcAft>
+                <a:spcPts val="600"/>
+              </a:spcAft>
+            </a:pPr>
+            <a:r>
+              <a:rPr sz="1500">
+                <a:solidFill>
+                  <a:srgbClr val="22282E"/>
+                </a:solidFill>
+              </a:rPr>
+              <a:t>•  Escribe una regla de detección para DCSync (evento 4662).</a:t>
+            </a:r>
+          </a:p>
+          <a:p>
+            <a:pPr>
+              <a:spcAft>
+                <a:spcPts val="600"/>
+              </a:spcAft>
+            </a:pPr>
+            <a:r>
+              <a:rPr sz="1500">
+                <a:solidFill>
+                  <a:srgbClr val="22282E"/>
+                </a:solidFill>
+              </a:rPr>
+              <a:t>•  Construye una capa de cobertura en Navigator con 5 técnicas.</a:t>
+            </a:r>
+          </a:p>
+          <a:p>
+            <a:pPr>
+              <a:spcAft>
+                <a:spcPts val="600"/>
+              </a:spcAft>
+            </a:pPr>
+            <a:r>
+              <a:rPr sz="1500">
+                <a:solidFill>
+                  <a:srgbClr val="22282E"/>
+                </a:solidFill>
+              </a:rPr>
+              <a:t>•  Reduce un falso positivo de una de tus reglas y documenta cómo.</a:t>
+            </a:r>
+          </a:p>
+          <a:p>
+            <a:pPr>
+              <a:spcAft>
+                <a:spcPts val="600"/>
+              </a:spcAft>
+            </a:pPr>
+            <a:r>
+              <a:rPr sz="1500">
+                <a:solidFill>
+                  <a:srgbClr val="22282E"/>
+                </a:solidFill>
+              </a:rPr>
+              <a:t>•  Redacta un hallazgo accionable para el SOC a partir de una técnica no detectada.</a:t>
             </a:r>
           </a:p>
         </p:txBody>
@@ -3347,7 +3365,7 @@
                   <a:srgbClr val="0B3D2E"/>
                 </a:solidFill>
               </a:rPr>
-              <a:t>❓ Preguntas frecuentes</a:t>
+              <a:t>📝 Reto verificable</a:t>
             </a:r>
           </a:p>
         </p:txBody>
@@ -3385,82 +3403,22 @@
                   <a:srgbClr val="22282E"/>
                 </a:solidFill>
               </a:rPr>
-              <a:t>•  ❓ ¿Purple team es un equipo o una actividad?</a:t>
-            </a:r>
-          </a:p>
-          <a:p>
-            <a:pPr>
-              <a:spcAft>
-                <a:spcPts val="600"/>
-              </a:spcAft>
-            </a:pPr>
-            <a:r>
-              <a:rPr sz="1500">
-                <a:solidFill>
-                  <a:srgbClr val="22282E"/>
-                </a:solidFill>
-              </a:rPr>
-              <a:t>•  Sobre todo una actividad/función: Red y Blue colaborando. Algunas organizaciones tienen un rol dedicado, pero el valor está en el proceso.</a:t>
-            </a:r>
-          </a:p>
-          <a:p>
-            <a:pPr>
-              <a:spcAft>
-                <a:spcPts val="600"/>
-              </a:spcAft>
-            </a:pPr>
-            <a:r>
-              <a:rPr sz="1500">
-                <a:solidFill>
-                  <a:srgbClr val="22282E"/>
-                </a:solidFill>
-              </a:rPr>
-              <a:t>•  ❓ ¿En qué se diferencia de un Red Team normal?</a:t>
-            </a:r>
-          </a:p>
-          <a:p>
-            <a:pPr>
-              <a:spcAft>
-                <a:spcPts val="600"/>
-              </a:spcAft>
-            </a:pPr>
-            <a:r>
-              <a:rPr sz="1500">
-                <a:solidFill>
-                  <a:srgbClr val="22282E"/>
-                </a:solidFill>
-              </a:rPr>
-              <a:t>•  El Red Team clásico prueba la detección sin avisar; el purple team colabora abiertamente para mejorarla técnica por técnica. Son complementarios.</a:t>
-            </a:r>
-          </a:p>
-          <a:p>
-            <a:pPr>
-              <a:spcAft>
-                <a:spcPts val="600"/>
-              </a:spcAft>
-            </a:pPr>
-            <a:r>
-              <a:rPr sz="1500">
-                <a:solidFill>
-                  <a:srgbClr val="22282E"/>
-                </a:solidFill>
-              </a:rPr>
-              <a:t>•  ❓ ¿Necesito Atomic Red Team?</a:t>
-            </a:r>
-          </a:p>
-          <a:p>
-            <a:pPr>
-              <a:spcAft>
-                <a:spcPts val="600"/>
-              </a:spcAft>
-            </a:pPr>
-            <a:r>
-              <a:rPr sz="1500">
-                <a:solidFill>
-                  <a:srgbClr val="22282E"/>
-                </a:solidFill>
-              </a:rPr>
-              <a:t>•  Ayuda mucho porque da TTPs atómicos reproducibles (Clase 180), pero puedes ejecutar las técnicas manualmente de las clases anteriores.</a:t>
+              <a:t>•  Ejecuta un ciclo purple completo sobre al menos 3 técnicas de esta parte: demuestra que inicialmente no se detectaban (o se detectaban mal) y que tras afinar reglas quedan cubiertas, reflejándolo en…</a:t>
+            </a:r>
+          </a:p>
+          <a:p>
+            <a:pPr>
+              <a:spcAft>
+                <a:spcPts val="600"/>
+              </a:spcAft>
+            </a:pPr>
+            <a:r>
+              <a:rPr sz="1500">
+                <a:solidFill>
+                  <a:srgbClr val="22282E"/>
+                </a:solidFill>
+              </a:rPr>
+              <a:t>•  Criterio de aceptación: para cada técnica presentas la ejecución, la observación en el SIEM, la regla creada/afinada y la reejecución que confirma la detección; el layer de Navigator muestra las 3…</a:t>
             </a:r>
           </a:p>
         </p:txBody>
@@ -3511,7 +3469,7 @@
                   <a:srgbClr val="0B3D2E"/>
                 </a:solidFill>
               </a:rPr>
-              <a:t>🔗 Referencias</a:t>
+              <a:t>⚠️ Errores comunes</a:t>
             </a:r>
           </a:p>
         </p:txBody>
@@ -3549,56 +3507,459 @@
                   <a:srgbClr val="22282E"/>
                 </a:solidFill>
               </a:rPr>
-              <a:t>•  MITRE ATT&amp;CK — Detections &amp; Data Sources. &lt;https://attack.mitre.org/datasources/&gt;</a:t>
-            </a:r>
-          </a:p>
-          <a:p>
-            <a:pPr>
-              <a:spcAft>
-                <a:spcPts val="600"/>
-              </a:spcAft>
-            </a:pPr>
-            <a:r>
-              <a:rPr sz="1500">
-                <a:solidFill>
-                  <a:srgbClr val="22282E"/>
-                </a:solidFill>
-              </a:rPr>
-              <a:t>•  SANS — Purple Team methodology / cursos SEC599.</a:t>
-            </a:r>
-          </a:p>
-          <a:p>
-            <a:pPr>
-              <a:spcAft>
-                <a:spcPts val="600"/>
-              </a:spcAft>
-            </a:pPr>
-            <a:r>
-              <a:rPr sz="1500">
-                <a:solidFill>
-                  <a:srgbClr val="22282E"/>
-                </a:solidFill>
-              </a:rPr>
-              <a:t>•  Atomic Red Team. &lt;https://github.com/redcanaryco/atomic-red-team&gt;</a:t>
-            </a:r>
-          </a:p>
-          <a:p>
-            <a:pPr>
-              <a:spcAft>
-                <a:spcPts val="600"/>
-              </a:spcAft>
-            </a:pPr>
-            <a:r>
-              <a:rPr sz="1500">
-                <a:solidFill>
-                  <a:srgbClr val="22282E"/>
-                </a:solidFill>
-              </a:rPr>
-              <a:t>•  Sysmon config (SwiftOnSecurity). &lt;https://github.com/SwiftOnSecurity/sysmon-config&gt;</a:t>
-            </a:r>
-          </a:p>
-        </p:txBody>
-      </p:sp>
+              <a:t>•  No llegan eventos al SIEM — Sysmon/forwarder mal configurado; valida el pipeline primero</a:t>
+            </a:r>
+          </a:p>
+          <a:p>
+            <a:pPr>
+              <a:spcAft>
+                <a:spcPts val="600"/>
+              </a:spcAft>
+            </a:pPr>
+            <a:r>
+              <a:rPr sz="1500">
+                <a:solidFill>
+                  <a:srgbClr val="22282E"/>
+                </a:solidFill>
+              </a:rPr>
+              <a:t>•  La regla no dispara — Campo/etype equivocado; inspecciona el evento crudo antes de escribir la regla</a:t>
+            </a:r>
+          </a:p>
+          <a:p>
+            <a:pPr>
+              <a:spcAft>
+                <a:spcPts val="600"/>
+              </a:spcAft>
+            </a:pPr>
+            <a:r>
+              <a:rPr sz="1500">
+                <a:solidFill>
+                  <a:srgbClr val="22282E"/>
+                </a:solidFill>
+              </a:rPr>
+              <a:t>•  Muchos falsos positivos — Regla demasiado amplia; añade umbrales y contexto</a:t>
+            </a:r>
+          </a:p>
+          <a:p>
+            <a:pPr>
+              <a:spcAft>
+                <a:spcPts val="600"/>
+              </a:spcAft>
+            </a:pPr>
+            <a:r>
+              <a:rPr sz="1500">
+                <a:solidFill>
+                  <a:srgbClr val="22282E"/>
+                </a:solidFill>
+              </a:rPr>
+              <a:t>•  Cobertura inflada — Marcaste "detectado" sin verificar; exige reejecución que confirme</a:t>
+            </a:r>
+          </a:p>
+          <a:p>
+            <a:pPr>
+              <a:spcAft>
+                <a:spcPts val="600"/>
+              </a:spcAft>
+            </a:pPr>
+            <a:r>
+              <a:rPr sz="1500">
+                <a:solidFill>
+                  <a:srgbClr val="22282E"/>
+                </a:solidFill>
+              </a:rPr>
+              <a:t>•  Red y Blue no coordinan — Falta agenda del ciclo; define quién ejecuta y quién observa cada TTP</a:t>
+            </a:r>
+          </a:p>
+        </p:txBody>
+      </p:sp>
+    </p:spTree>
+  </p:cSld>
+  <p:clrMapOvr>
+    <a:masterClrMapping/>
+  </p:clrMapOvr>
+</p:sld>
+</file>
+
+<file path=ppt/slides/slide13.xml><?xml version="1.0" encoding="utf-8"?>
+<p:sld xmlns:a="http://schemas.openxmlformats.org/drawingml/2006/main" xmlns:p="http://schemas.openxmlformats.org/presentationml/2006/main" xmlns:r="http://schemas.openxmlformats.org/officeDocument/2006/relationships">
+  <p:cSld>
+    <p:spTree>
+      <p:nvGrpSpPr>
+        <p:cNvPr id="1" name=""/>
+        <p:cNvGrpSpPr/>
+        <p:nvPr/>
+      </p:nvGrpSpPr>
+      <p:grpSpPr/>
+      <p:sp>
+        <p:nvSpPr>
+          <p:cNvPr id="2" name="TextBox 1"/>
+          <p:cNvSpPr txBox="1"/>
+          <p:nvPr/>
+        </p:nvSpPr>
+        <p:spPr>
+          <a:xfrm>
+            <a:off x="457200" y="320040"/>
+            <a:ext cx="8229600" cy="822960"/>
+          </a:xfrm>
+          <a:prstGeom prst="rect">
+            <a:avLst/>
+          </a:prstGeom>
+          <a:noFill/>
+        </p:spPr>
+        <p:txBody>
+          <a:bodyPr wrap="square">
+            <a:spAutoFit/>
+          </a:bodyPr>
+          <a:lstStyle/>
+          <a:p>
+            <a:r>
+              <a:rPr sz="2600" b="1">
+                <a:solidFill>
+                  <a:srgbClr val="0B3D2E"/>
+                </a:solidFill>
+              </a:rPr>
+              <a:t>❓ Preguntas frecuentes</a:t>
+            </a:r>
+          </a:p>
+        </p:txBody>
+      </p:sp>
+      <p:sp>
+        <p:nvSpPr>
+          <p:cNvPr id="3" name="TextBox 2"/>
+          <p:cNvSpPr txBox="1"/>
+          <p:nvPr/>
+        </p:nvSpPr>
+        <p:spPr>
+          <a:xfrm>
+            <a:off x="457200" y="1280160"/>
+            <a:ext cx="8229600" cy="4937760"/>
+          </a:xfrm>
+          <a:prstGeom prst="rect">
+            <a:avLst/>
+          </a:prstGeom>
+          <a:noFill/>
+        </p:spPr>
+        <p:txBody>
+          <a:bodyPr wrap="square">
+            <a:spAutoFit/>
+          </a:bodyPr>
+          <a:lstStyle/>
+          <a:p>
+            <a:pPr>
+              <a:spcAft>
+                <a:spcPts val="600"/>
+              </a:spcAft>
+            </a:pPr>
+            <a:r>
+              <a:rPr sz="1500">
+                <a:solidFill>
+                  <a:srgbClr val="22282E"/>
+                </a:solidFill>
+              </a:rPr>
+              <a:t>•  ❓ ¿Purple team es un equipo o una actividad?</a:t>
+            </a:r>
+          </a:p>
+          <a:p>
+            <a:pPr>
+              <a:spcAft>
+                <a:spcPts val="600"/>
+              </a:spcAft>
+            </a:pPr>
+            <a:r>
+              <a:rPr sz="1500">
+                <a:solidFill>
+                  <a:srgbClr val="22282E"/>
+                </a:solidFill>
+              </a:rPr>
+              <a:t>•  Sobre todo una actividad/función: Red y Blue colaborando. Algunas organizaciones tienen un rol dedicado, pero el valor está en el proceso.</a:t>
+            </a:r>
+          </a:p>
+          <a:p>
+            <a:pPr>
+              <a:spcAft>
+                <a:spcPts val="600"/>
+              </a:spcAft>
+            </a:pPr>
+            <a:r>
+              <a:rPr sz="1500">
+                <a:solidFill>
+                  <a:srgbClr val="22282E"/>
+                </a:solidFill>
+              </a:rPr>
+              <a:t>•  ❓ ¿En qué se diferencia de un Red Team normal?</a:t>
+            </a:r>
+          </a:p>
+          <a:p>
+            <a:pPr>
+              <a:spcAft>
+                <a:spcPts val="600"/>
+              </a:spcAft>
+            </a:pPr>
+            <a:r>
+              <a:rPr sz="1500">
+                <a:solidFill>
+                  <a:srgbClr val="22282E"/>
+                </a:solidFill>
+              </a:rPr>
+              <a:t>•  El Red Team clásico prueba la detección sin avisar; el purple team colabora abiertamente para mejorarla técnica por técnica. Son complementarios.</a:t>
+            </a:r>
+          </a:p>
+          <a:p>
+            <a:pPr>
+              <a:spcAft>
+                <a:spcPts val="600"/>
+              </a:spcAft>
+            </a:pPr>
+            <a:r>
+              <a:rPr sz="1500">
+                <a:solidFill>
+                  <a:srgbClr val="22282E"/>
+                </a:solidFill>
+              </a:rPr>
+              <a:t>•  ❓ ¿Necesito Atomic Red Team?</a:t>
+            </a:r>
+          </a:p>
+          <a:p>
+            <a:pPr>
+              <a:spcAft>
+                <a:spcPts val="600"/>
+              </a:spcAft>
+            </a:pPr>
+            <a:r>
+              <a:rPr sz="1500">
+                <a:solidFill>
+                  <a:srgbClr val="22282E"/>
+                </a:solidFill>
+              </a:rPr>
+              <a:t>•  Ayuda mucho porque da TTPs atómicos reproducibles (Clase 180), pero puedes ejecutar las técnicas manualmente de las clases anteriores.</a:t>
+            </a:r>
+          </a:p>
+        </p:txBody>
+      </p:sp>
+    </p:spTree>
+  </p:cSld>
+  <p:clrMapOvr>
+    <a:masterClrMapping/>
+  </p:clrMapOvr>
+</p:sld>
+</file>
+
+<file path=ppt/slides/slide14.xml><?xml version="1.0" encoding="utf-8"?>
+<p:sld xmlns:a="http://schemas.openxmlformats.org/drawingml/2006/main" xmlns:p="http://schemas.openxmlformats.org/presentationml/2006/main" xmlns:r="http://schemas.openxmlformats.org/officeDocument/2006/relationships">
+  <p:cSld>
+    <p:spTree>
+      <p:nvGrpSpPr>
+        <p:cNvPr id="1" name=""/>
+        <p:cNvGrpSpPr/>
+        <p:nvPr/>
+      </p:nvGrpSpPr>
+      <p:grpSpPr/>
+      <p:sp>
+        <p:nvSpPr>
+          <p:cNvPr id="2" name="TextBox 1"/>
+          <p:cNvSpPr txBox="1"/>
+          <p:nvPr/>
+        </p:nvSpPr>
+        <p:spPr>
+          <a:xfrm>
+            <a:off x="457200" y="320040"/>
+            <a:ext cx="8229600" cy="822960"/>
+          </a:xfrm>
+          <a:prstGeom prst="rect">
+            <a:avLst/>
+          </a:prstGeom>
+          <a:noFill/>
+        </p:spPr>
+        <p:txBody>
+          <a:bodyPr wrap="square">
+            <a:spAutoFit/>
+          </a:bodyPr>
+          <a:lstStyle/>
+          <a:p>
+            <a:r>
+              <a:rPr sz="2600" b="1">
+                <a:solidFill>
+                  <a:srgbClr val="0B3D2E"/>
+                </a:solidFill>
+              </a:rPr>
+              <a:t>🔗 Referencias</a:t>
+            </a:r>
+          </a:p>
+        </p:txBody>
+      </p:sp>
+      <p:sp>
+        <p:nvSpPr>
+          <p:cNvPr id="3" name="TextBox 2"/>
+          <p:cNvSpPr txBox="1"/>
+          <p:nvPr/>
+        </p:nvSpPr>
+        <p:spPr>
+          <a:xfrm>
+            <a:off x="457200" y="1280160"/>
+            <a:ext cx="8229600" cy="4937760"/>
+          </a:xfrm>
+          <a:prstGeom prst="rect">
+            <a:avLst/>
+          </a:prstGeom>
+          <a:noFill/>
+        </p:spPr>
+        <p:txBody>
+          <a:bodyPr wrap="square">
+            <a:spAutoFit/>
+          </a:bodyPr>
+          <a:lstStyle/>
+          <a:p>
+            <a:pPr>
+              <a:spcAft>
+                <a:spcPts val="600"/>
+              </a:spcAft>
+            </a:pPr>
+            <a:r>
+              <a:rPr sz="1500">
+                <a:solidFill>
+                  <a:srgbClr val="22282E"/>
+                </a:solidFill>
+              </a:rPr>
+              <a:t>•  MITRE ATT&amp;CK — Data Sources. &lt;https://attack.mitre.org/datasources/&gt; — vocabulario para relacionar comportamiento con componentes de telemetría.</a:t>
+            </a:r>
+          </a:p>
+          <a:p>
+            <a:pPr>
+              <a:spcAft>
+                <a:spcPts val="600"/>
+              </a:spcAft>
+            </a:pPr>
+            <a:r>
+              <a:rPr sz="1500">
+                <a:solidFill>
+                  <a:srgbClr val="22282E"/>
+                </a:solidFill>
+              </a:rPr>
+              <a:t>•  MITRE ATT&amp;CK — Detection Strategies. &lt;https://attack.mitre.org/detectionstrategies/&gt; — referencia para separar estrategia, analíticas y fuentes requeridas.</a:t>
+            </a:r>
+          </a:p>
+          <a:p>
+            <a:pPr>
+              <a:spcAft>
+                <a:spcPts val="600"/>
+              </a:spcAft>
+            </a:pPr>
+            <a:r>
+              <a:rPr sz="1500">
+                <a:solidFill>
+                  <a:srgbClr val="22282E"/>
+                </a:solidFill>
+              </a:rPr>
+              <a:t>•  Atomic Red Team — documentación oficial. &lt;https://www.atomicredteam.io/docs/atomic-red-team&gt; — sustenta pruebas pequeñas, prerrequisitos, autorización y limpieza.</a:t>
+            </a:r>
+          </a:p>
+          <a:p>
+            <a:pPr>
+              <a:spcAft>
+                <a:spcPts val="600"/>
+              </a:spcAft>
+            </a:pPr>
+            <a:r>
+              <a:rPr sz="1500">
+                <a:solidFill>
+                  <a:srgbClr val="22282E"/>
+                </a:solidFill>
+              </a:rPr>
+              <a:t>•  MITRE ATT&amp;CK Navigator. &lt;https://github.com/mitre-attack/attack-navigator&gt; — herramienta usada para comunicar capas de cobertura sin reemplazar la evidencia de prueba.</a:t>
+            </a:r>
+          </a:p>
+          <a:p>
+            <a:pPr>
+              <a:spcAft>
+                <a:spcPts val="600"/>
+              </a:spcAft>
+            </a:pPr>
+            <a:r>
+              <a:rPr sz="1500">
+                <a:solidFill>
+                  <a:srgbClr val="22282E"/>
+                </a:solidFill>
+              </a:rPr>
+              <a:t>•  Sysmon configuration. &lt;https://github.com/SwiftOnSecurity/sysmon-config&gt; — configuración comunitaria de laboratorio; debe adaptarse al entorno y no se presenta como estándar universal.</a:t>
+            </a:r>
+          </a:p>
+        </p:txBody>
+      </p:sp>
+    </p:spTree>
+  </p:cSld>
+  <p:clrMapOvr>
+    <a:masterClrMapping/>
+  </p:clrMapOvr>
+</p:sld>
+</file>
+
+<file path=ppt/slides/slide15.xml><?xml version="1.0" encoding="utf-8"?>
+<p:sld xmlns:a="http://schemas.openxmlformats.org/drawingml/2006/main" xmlns:p="http://schemas.openxmlformats.org/presentationml/2006/main" xmlns:r="http://schemas.openxmlformats.org/officeDocument/2006/relationships">
+  <p:cSld>
+    <p:spTree>
+      <p:nvGrpSpPr>
+        <p:cNvPr id="1" name=""/>
+        <p:cNvGrpSpPr/>
+        <p:nvPr/>
+      </p:nvGrpSpPr>
+      <p:grpSpPr/>
+      <p:sp>
+        <p:nvSpPr>
+          <p:cNvPr id="2" name="TextBox 1"/>
+          <p:cNvSpPr txBox="1"/>
+          <p:nvPr/>
+        </p:nvSpPr>
+        <p:spPr>
+          <a:xfrm>
+            <a:off x="457200" y="274320"/>
+            <a:ext cx="8229600" cy="640080"/>
+          </a:xfrm>
+          <a:prstGeom prst="rect">
+            <a:avLst/>
+          </a:prstGeom>
+          <a:noFill/>
+        </p:spPr>
+        <p:txBody>
+          <a:bodyPr wrap="square">
+            <a:spAutoFit/>
+          </a:bodyPr>
+          <a:lstStyle/>
+          <a:p>
+            <a:r>
+              <a:rPr sz="2200" b="1">
+                <a:solidFill>
+                  <a:srgbClr val="0B3D2E"/>
+                </a:solidFill>
+              </a:rPr>
+              <a:t>Diagrama de la clase</a:t>
+            </a:r>
+          </a:p>
+        </p:txBody>
+      </p:sp>
+      <p:pic>
+        <p:nvPicPr>
+          <p:cNvPr id="3" name="Picture 2" descr="cbcdbfea6054e196.png"/>
+          <p:cNvPicPr>
+            <a:picLocks noChangeAspect="1"/>
+          </p:cNvPicPr>
+          <p:nvPr/>
+        </p:nvPicPr>
+        <p:blipFill>
+          <a:blip r:embed="rId2"/>
+          <a:stretch>
+            <a:fillRect/>
+          </a:stretch>
+        </p:blipFill>
+        <p:spPr>
+          <a:xfrm>
+            <a:off x="457200" y="3419856"/>
+            <a:ext cx="8229600" cy="658368"/>
+          </a:xfrm>
+          <a:prstGeom prst="rect">
+            <a:avLst/>
+          </a:prstGeom>
+        </p:spPr>
+      </p:pic>
     </p:spTree>
   </p:cSld>
   <p:clrMapOvr>
@@ -3683,7 +4044,7 @@
                   <a:srgbClr val="22282E"/>
                 </a:solidFill>
               </a:rPr>
-              <a:t>•  Convertir el conocimiento ofensivo en mejora defensiva mediante el purple teaming: la colaboración estructurada entre Red y Blue para probar, medir y afinar detecciones técnica por técnica. El alumno aprenderá a ejecutar un ciclo purple (planificar TTP → ejecutar → observar → ajustar detección → reejecutar) y a documentar la cobertura resultante en ATT&amp;CK.</a:t>
+              <a:t>•  Convertir el conocimiento ofensivo en mejora defensiva mediante el purple teaming: la colaboración estructurada entre Red y Blue para probar, medir y afinar detecciones técnica por técnica. El alumno…</a:t>
             </a:r>
           </a:p>
         </p:txBody>
@@ -4077,7 +4438,7 @@
                   <a:srgbClr val="0B3D2E"/>
                 </a:solidFill>
               </a:rPr>
-              <a:t>📖 Definiciones y características</a:t>
+              <a:t>🧠 Explicación en profundidad</a:t>
             </a:r>
           </a:p>
         </p:txBody>
@@ -4115,82 +4476,82 @@
                   <a:srgbClr val="22282E"/>
                 </a:solidFill>
               </a:rPr>
-              <a:t>•  Purple team: colaboración Red+Blue en tiempo real para mejorar detección. Característica: objetivo compartido, no adversarial.</a:t>
-            </a:r>
-          </a:p>
-          <a:p>
-            <a:pPr>
-              <a:spcAft>
-                <a:spcPts val="600"/>
-              </a:spcAft>
-            </a:pPr>
-            <a:r>
-              <a:rPr sz="1500">
-                <a:solidFill>
-                  <a:srgbClr val="22282E"/>
-                </a:solidFill>
-              </a:rPr>
-              <a:t>•  Ciclo purple: iterar ejecución de un TTP y ajuste de la detección hasta cubrirlo. Característica: iterativo y medible.</a:t>
-            </a:r>
-          </a:p>
-          <a:p>
-            <a:pPr>
-              <a:spcAft>
-                <a:spcPts val="600"/>
-              </a:spcAft>
-            </a:pPr>
-            <a:r>
-              <a:rPr sz="1500">
-                <a:solidFill>
-                  <a:srgbClr val="22282E"/>
-                </a:solidFill>
-              </a:rPr>
-              <a:t>•  Detection engineering: disciplina de crear y afinar reglas de detección. Característica: nace de observar TTPs reales.</a:t>
-            </a:r>
-          </a:p>
-          <a:p>
-            <a:pPr>
-              <a:spcAft>
-                <a:spcPts val="600"/>
-              </a:spcAft>
-            </a:pPr>
-            <a:r>
-              <a:rPr sz="1500">
-                <a:solidFill>
-                  <a:srgbClr val="22282E"/>
-                </a:solidFill>
-              </a:rPr>
-              <a:t>•  Cobertura ATT&amp;CK: porcentaje de técnicas relevantes que se detectan. Característica: se visualiza en Navigator.</a:t>
-            </a:r>
-          </a:p>
-          <a:p>
-            <a:pPr>
-              <a:spcAft>
-                <a:spcPts val="600"/>
-              </a:spcAft>
-            </a:pPr>
-            <a:r>
-              <a:rPr sz="1500">
-                <a:solidFill>
-                  <a:srgbClr val="22282E"/>
-                </a:solidFill>
-              </a:rPr>
-              <a:t>•  True/false positive: alerta correcta vs falsa. Característica: el ciclo purple busca maximizar TP y reducir FP.</a:t>
-            </a:r>
-          </a:p>
-          <a:p>
-            <a:pPr>
-              <a:spcAft>
-                <a:spcPts val="600"/>
-              </a:spcAft>
-            </a:pPr>
-            <a:r>
-              <a:rPr sz="1500">
-                <a:solidFill>
-                  <a:srgbClr val="22282E"/>
-                </a:solidFill>
-              </a:rPr>
-              <a:t>•  Detección vs prevención: alertar sobre vs bloquear. Característica: el purple team mide ambas.</a:t>
+              <a:t>•  Purple teaming describe colaboración estructurada entre quienes emulan comportamiento adversario y quienes operan la defensa. Puede realizarse con personas que conservan roles separados; no exige…</a:t>
+            </a:r>
+          </a:p>
+          <a:p>
+            <a:pPr>
+              <a:spcAft>
+                <a:spcPts val="600"/>
+              </a:spcAft>
+            </a:pPr>
+            <a:r>
+              <a:rPr sz="1500">
+                <a:solidFill>
+                  <a:srgbClr val="22282E"/>
+                </a:solidFill>
+              </a:rPr>
+              <a:t>•  La técnica ATT&amp;CK es un identificador útil, pero todavía no es un caso de prueba. Hay que definir procedimiento, activo, identidad, resultado esperado, fuentes de datos y condición de limpieza. Dos…</a:t>
+            </a:r>
+          </a:p>
+          <a:p>
+            <a:pPr>
+              <a:spcAft>
+                <a:spcPts val="600"/>
+              </a:spcAft>
+            </a:pPr>
+            <a:r>
+              <a:rPr sz="1500">
+                <a:solidFill>
+                  <a:srgbClr val="22282E"/>
+                </a:solidFill>
+              </a:rPr>
+              <a:t>•  Que Sysmon o el EDR registre un evento demuestra visibilidad, no detección. Una regla que coincide demuestra analítica, pero todavía debe generar una alerta enrutable, con contexto suficiente y un…</a:t>
+            </a:r>
+          </a:p>
+          <a:p>
+            <a:pPr>
+              <a:spcAft>
+                <a:spcPts val="600"/>
+              </a:spcAft>
+            </a:pPr>
+            <a:r>
+              <a:rPr sz="1500">
+                <a:solidFill>
+                  <a:srgbClr val="22282E"/>
+                </a:solidFill>
+              </a:rPr>
+              <a:t>•  También se registra prevención por separado. Si un control bloquea la prueba, se valida el evento de bloqueo y se decide si aún debe existir una detección. La defensa robusta no depende de una sola…</a:t>
+            </a:r>
+          </a:p>
+          <a:p>
+            <a:pPr>
+              <a:spcAft>
+                <a:spcPts val="600"/>
+              </a:spcAft>
+            </a:pPr>
+            <a:r>
+              <a:rPr sz="1500">
+                <a:solidFill>
+                  <a:srgbClr val="22282E"/>
+                </a:solidFill>
+              </a:rPr>
+              <a:t>•  Colorear una técnica completa como «detectada» puede sobrestimar madurez. La cobertura pertenece a una combinación de procedimiento, plataforma, fuente, versión y analítica. Conviene usar estados…</a:t>
+            </a:r>
+          </a:p>
+          <a:p>
+            <a:pPr>
+              <a:spcAft>
+                <a:spcPts val="600"/>
+              </a:spcAft>
+            </a:pPr>
+            <a:r>
+              <a:rPr sz="1500">
+                <a:solidFill>
+                  <a:srgbClr val="22282E"/>
+                </a:solidFill>
+              </a:rPr>
+              <a:t>•  Cada prueba conserva versión, entradas, hashes o identificadores, hora y limpieza. Tras cambiar un sensor o regla se ejecuta exactamente la misma variante, y luego una variante vecina para evitar…</a:t>
             </a:r>
           </a:p>
         </p:txBody>
@@ -4241,7 +4602,7 @@
                   <a:srgbClr val="0B3D2E"/>
                 </a:solidFill>
               </a:rPr>
-              <a:t>🧰 Herramientas y preparación</a:t>
+              <a:t>📖 Definiciones y características</a:t>
             </a:r>
           </a:p>
         </p:txBody>
@@ -4279,52 +4640,82 @@
                   <a:srgbClr val="22282E"/>
                 </a:solidFill>
               </a:rPr>
-              <a:t>•  El AD lab con instrumentación defensiva: Sysmon (config SwiftOnSecurity), un SIEM (Elastic/Wazuh/Splunk free) y/o EDR.</a:t>
-            </a:r>
-          </a:p>
-          <a:p>
-            <a:pPr>
-              <a:spcAft>
-                <a:spcPts val="600"/>
-              </a:spcAft>
-            </a:pPr>
-            <a:r>
-              <a:rPr sz="1500">
-                <a:solidFill>
-                  <a:srgbClr val="22282E"/>
-                </a:solidFill>
-              </a:rPr>
-              <a:t>•  Atomic Red Team (Clase 180) para ejecutar TTPs atómicos reproducibles.</a:t>
-            </a:r>
-          </a:p>
-          <a:p>
-            <a:pPr>
-              <a:spcAft>
-                <a:spcPts val="600"/>
-              </a:spcAft>
-            </a:pPr>
-            <a:r>
-              <a:rPr sz="1500">
-                <a:solidFill>
-                  <a:srgbClr val="22282E"/>
-                </a:solidFill>
-              </a:rPr>
-              <a:t>•  ATT&amp;CK Navigator para la matriz de cobertura.</a:t>
-            </a:r>
-          </a:p>
-          <a:p>
-            <a:pPr>
-              <a:spcAft>
-                <a:spcPts val="600"/>
-              </a:spcAft>
-            </a:pPr>
-            <a:r>
-              <a:rPr sz="1500">
-                <a:solidFill>
-                  <a:srgbClr val="22282E"/>
-                </a:solidFill>
-              </a:rPr>
-              <a:t>•  Las técnicas ofensivas de las clases anteriores como insumos a detectar.</a:t>
+              <a:t>•  Purple team: colaboración Red+Blue en tiempo real para mejorar detección. Característica: objetivo compartido, no adversarial.</a:t>
+            </a:r>
+          </a:p>
+          <a:p>
+            <a:pPr>
+              <a:spcAft>
+                <a:spcPts val="600"/>
+              </a:spcAft>
+            </a:pPr>
+            <a:r>
+              <a:rPr sz="1500">
+                <a:solidFill>
+                  <a:srgbClr val="22282E"/>
+                </a:solidFill>
+              </a:rPr>
+              <a:t>•  Ciclo purple: iterar ejecución de un TTP y ajuste de la detección hasta cubrirlo. Característica: iterativo y medible.</a:t>
+            </a:r>
+          </a:p>
+          <a:p>
+            <a:pPr>
+              <a:spcAft>
+                <a:spcPts val="600"/>
+              </a:spcAft>
+            </a:pPr>
+            <a:r>
+              <a:rPr sz="1500">
+                <a:solidFill>
+                  <a:srgbClr val="22282E"/>
+                </a:solidFill>
+              </a:rPr>
+              <a:t>•  Detection engineering: disciplina de crear y afinar reglas de detección. Característica: nace de observar TTPs reales.</a:t>
+            </a:r>
+          </a:p>
+          <a:p>
+            <a:pPr>
+              <a:spcAft>
+                <a:spcPts val="600"/>
+              </a:spcAft>
+            </a:pPr>
+            <a:r>
+              <a:rPr sz="1500">
+                <a:solidFill>
+                  <a:srgbClr val="22282E"/>
+                </a:solidFill>
+              </a:rPr>
+              <a:t>•  Cobertura ATT&amp;CK: estado documentado de procedimientos relevantes por plataforma, fuente y analítica. Característica: Navigator ayuda a visualizarla, pero no existe un porcentaje universal sin…</a:t>
+            </a:r>
+          </a:p>
+          <a:p>
+            <a:pPr>
+              <a:spcAft>
+                <a:spcPts val="600"/>
+              </a:spcAft>
+            </a:pPr>
+            <a:r>
+              <a:rPr sz="1500">
+                <a:solidFill>
+                  <a:srgbClr val="22282E"/>
+                </a:solidFill>
+              </a:rPr>
+              <a:t>•  True/false positive: alerta correcta vs falsa. Característica: el ciclo purple busca maximizar TP y reducir FP.</a:t>
+            </a:r>
+          </a:p>
+          <a:p>
+            <a:pPr>
+              <a:spcAft>
+                <a:spcPts val="600"/>
+              </a:spcAft>
+            </a:pPr>
+            <a:r>
+              <a:rPr sz="1500">
+                <a:solidFill>
+                  <a:srgbClr val="22282E"/>
+                </a:solidFill>
+              </a:rPr>
+              <a:t>•  Detección vs prevención: alertar sobre vs bloquear. Característica: el purple team mide ambas.</a:t>
             </a:r>
           </a:p>
         </p:txBody>
@@ -4375,7 +4766,7 @@
                   <a:srgbClr val="0B3D2E"/>
                 </a:solidFill>
               </a:rPr>
-              <a:t>🧪 Laboratorio guiado</a:t>
+              <a:t>📔 Glosario</a:t>
             </a:r>
           </a:p>
         </p:txBody>
@@ -4413,97 +4804,97 @@
                   <a:srgbClr val="22282E"/>
                 </a:solidFill>
               </a:rPr>
-              <a:t>•  Prepara la instrumentación. Instala Sysmon con una config robusta y envía eventos a tu SIEM; verifica que llegan.</a:t>
-            </a:r>
-          </a:p>
-          <a:p>
-            <a:pPr>
-              <a:spcAft>
-                <a:spcPts val="600"/>
-              </a:spcAft>
-            </a:pPr>
-            <a:r>
-              <a:rPr sz="1500">
-                <a:solidFill>
-                  <a:srgbClr val="22282E"/>
-                </a:solidFill>
-              </a:rPr>
-              <a:t>•  Elige un TTP. Toma Kerberoasting (T1558.003) de la Clase 171.</a:t>
-            </a:r>
-          </a:p>
-          <a:p>
-            <a:pPr>
-              <a:spcAft>
-                <a:spcPts val="600"/>
-              </a:spcAft>
-            </a:pPr>
-            <a:r>
-              <a:rPr sz="1500">
-                <a:solidFill>
-                  <a:srgbClr val="22282E"/>
-                </a:solidFill>
-              </a:rPr>
-              <a:t>•  Ejecuta y observa (ronda 1). Lanza el ataque y busca en el SIEM el evento 4769 con etype RC4; comprueba si existe una regla que alerte.</a:t>
-            </a:r>
-          </a:p>
-          <a:p>
-            <a:pPr>
-              <a:spcAft>
-                <a:spcPts val="600"/>
-              </a:spcAft>
-            </a:pPr>
-            <a:r>
-              <a:rPr sz="1500">
-                <a:solidFill>
-                  <a:srgbClr val="22282E"/>
-                </a:solidFill>
-              </a:rPr>
-              <a:t>•  Ajusta la detección. Escribe/afina una regla que alerte ante múltiples 4769 RC4 en poco tiempo desde un mismo origen.</a:t>
-            </a:r>
-          </a:p>
-          <a:p>
-            <a:pPr>
-              <a:spcAft>
-                <a:spcPts val="600"/>
-              </a:spcAft>
-            </a:pPr>
-            <a:r>
-              <a:rPr sz="1500">
-                <a:solidFill>
-                  <a:srgbClr val="22282E"/>
-                </a:solidFill>
-              </a:rPr>
-              <a:t>•  Reejecuta (ronda 2). Vuelve a lanzar Kerberoasting y confirma que ahora sí dispara la alerta; reduce falsos positivos si aparecen.</a:t>
-            </a:r>
-          </a:p>
-          <a:p>
-            <a:pPr>
-              <a:spcAft>
-                <a:spcPts val="600"/>
-              </a:spcAft>
-            </a:pPr>
-            <a:r>
-              <a:rPr sz="1500">
-                <a:solidFill>
-                  <a:srgbClr val="22282E"/>
-                </a:solidFill>
-              </a:rPr>
-              <a:t>•  Mide cobertura. En Navigator, marca el TTP como "detectado" (verde) y repite el ciclo con 2–3 técnicas más (PtH, DCSync).</a:t>
-            </a:r>
-          </a:p>
-          <a:p>
-            <a:pPr>
-              <a:spcAft>
-                <a:spcPts val="600"/>
-              </a:spcAft>
-            </a:pPr>
-            <a:r>
-              <a:rPr sz="1500">
-                <a:solidFill>
-                  <a:srgbClr val="22282E"/>
-                </a:solidFill>
-              </a:rPr>
-              <a:t>•  Documenta. Registra por técnica: qué se ejecutó, qué se observó, la regla creada y el estado de cobertura.</a:t>
+              <a:t>•  Purple teaming: colaboración iterativa para validar y mejorar controles con comportamiento adversario controlado.</a:t>
+            </a:r>
+          </a:p>
+          <a:p>
+            <a:pPr>
+              <a:spcAft>
+                <a:spcPts val="600"/>
+              </a:spcAft>
+            </a:pPr>
+            <a:r>
+              <a:rPr sz="1500">
+                <a:solidFill>
+                  <a:srgbClr val="22282E"/>
+                </a:solidFill>
+              </a:rPr>
+              <a:t>•  Hipótesis de detección: afirmación comprobable sobre datos, analítica y resultado esperado.</a:t>
+            </a:r>
+          </a:p>
+          <a:p>
+            <a:pPr>
+              <a:spcAft>
+                <a:spcPts val="600"/>
+              </a:spcAft>
+            </a:pPr>
+            <a:r>
+              <a:rPr sz="1500">
+                <a:solidFill>
+                  <a:srgbClr val="22282E"/>
+                </a:solidFill>
+              </a:rPr>
+              <a:t>•  Procedimiento: implementación concreta de una técnica en un contexto definido.</a:t>
+            </a:r>
+          </a:p>
+          <a:p>
+            <a:pPr>
+              <a:spcAft>
+                <a:spcPts val="600"/>
+              </a:spcAft>
+            </a:pPr>
+            <a:r>
+              <a:rPr sz="1500">
+                <a:solidFill>
+                  <a:srgbClr val="22282E"/>
+                </a:solidFill>
+              </a:rPr>
+              <a:t>•  Fuente de datos: sistema o componente que produce observaciones relevantes.</a:t>
+            </a:r>
+          </a:p>
+          <a:p>
+            <a:pPr>
+              <a:spcAft>
+                <a:spcPts val="600"/>
+              </a:spcAft>
+            </a:pPr>
+            <a:r>
+              <a:rPr sz="1500">
+                <a:solidFill>
+                  <a:srgbClr val="22282E"/>
+                </a:solidFill>
+              </a:rPr>
+              <a:t>•  Telemetría: eventos y medidas recogidos antes de aplicar una decisión de detección.</a:t>
+            </a:r>
+          </a:p>
+          <a:p>
+            <a:pPr>
+              <a:spcAft>
+                <a:spcPts val="600"/>
+              </a:spcAft>
+            </a:pPr>
+            <a:r>
+              <a:rPr sz="1500">
+                <a:solidFill>
+                  <a:srgbClr val="22282E"/>
+                </a:solidFill>
+              </a:rPr>
+              <a:t>•  Analítica: lógica que transforma datos en una señal con significado.</a:t>
+            </a:r>
+          </a:p>
+          <a:p>
+            <a:pPr>
+              <a:spcAft>
+                <a:spcPts val="600"/>
+              </a:spcAft>
+            </a:pPr>
+            <a:r>
+              <a:rPr sz="1500">
+                <a:solidFill>
+                  <a:srgbClr val="22282E"/>
+                </a:solidFill>
+              </a:rPr>
+              <a:t>•  True positive: alerta que corresponde correctamente al comportamiento probado.</a:t>
             </a:r>
           </a:p>
         </p:txBody>
@@ -4554,7 +4945,7 @@
                   <a:srgbClr val="0B3D2E"/>
                 </a:solidFill>
               </a:rPr>
-              <a:t>✍️ Ejercicios</a:t>
+              <a:t>🧰 Herramientas y preparación</a:t>
             </a:r>
           </a:p>
         </p:txBody>
@@ -4592,82 +4983,52 @@
                   <a:srgbClr val="22282E"/>
                 </a:solidFill>
               </a:rPr>
-              <a:t>•  Explica el ciclo purple con un diagrama.</a:t>
-            </a:r>
-          </a:p>
-          <a:p>
-            <a:pPr>
-              <a:spcAft>
-                <a:spcPts val="600"/>
-              </a:spcAft>
-            </a:pPr>
-            <a:r>
-              <a:rPr sz="1500">
-                <a:solidFill>
-                  <a:srgbClr val="22282E"/>
-                </a:solidFill>
-              </a:rPr>
-              <a:t>•  Ejecuta un ciclo purple completo sobre Pass-the-Hash.</a:t>
-            </a:r>
-          </a:p>
-          <a:p>
-            <a:pPr>
-              <a:spcAft>
-                <a:spcPts val="600"/>
-              </a:spcAft>
-            </a:pPr>
-            <a:r>
-              <a:rPr sz="1500">
-                <a:solidFill>
-                  <a:srgbClr val="22282E"/>
-                </a:solidFill>
-              </a:rPr>
-              <a:t>•  Escribe una regla de detección para DCSync (evento 4662).</a:t>
-            </a:r>
-          </a:p>
-          <a:p>
-            <a:pPr>
-              <a:spcAft>
-                <a:spcPts val="600"/>
-              </a:spcAft>
-            </a:pPr>
-            <a:r>
-              <a:rPr sz="1500">
-                <a:solidFill>
-                  <a:srgbClr val="22282E"/>
-                </a:solidFill>
-              </a:rPr>
-              <a:t>•  Construye una capa de cobertura en Navigator con 5 técnicas.</a:t>
-            </a:r>
-          </a:p>
-          <a:p>
-            <a:pPr>
-              <a:spcAft>
-                <a:spcPts val="600"/>
-              </a:spcAft>
-            </a:pPr>
-            <a:r>
-              <a:rPr sz="1500">
-                <a:solidFill>
-                  <a:srgbClr val="22282E"/>
-                </a:solidFill>
-              </a:rPr>
-              <a:t>•  Reduce un falso positivo de una de tus reglas y documenta cómo.</a:t>
-            </a:r>
-          </a:p>
-          <a:p>
-            <a:pPr>
-              <a:spcAft>
-                <a:spcPts val="600"/>
-              </a:spcAft>
-            </a:pPr>
-            <a:r>
-              <a:rPr sz="1500">
-                <a:solidFill>
-                  <a:srgbClr val="22282E"/>
-                </a:solidFill>
-              </a:rPr>
-              <a:t>•  Redacta un hallazgo accionable para el SOC a partir de una técnica no detectada.</a:t>
+              <a:t>•  El AD lab con instrumentación defensiva: Sysmon (config SwiftOnSecurity), un SIEM (Elastic/Wazuh/Splunk free) y/o EDR.</a:t>
+            </a:r>
+          </a:p>
+          <a:p>
+            <a:pPr>
+              <a:spcAft>
+                <a:spcPts val="600"/>
+              </a:spcAft>
+            </a:pPr>
+            <a:r>
+              <a:rPr sz="1500">
+                <a:solidFill>
+                  <a:srgbClr val="22282E"/>
+                </a:solidFill>
+              </a:rPr>
+              <a:t>•  Atomic Red Team (Clase 180) para ejecutar TTPs atómicos reproducibles.</a:t>
+            </a:r>
+          </a:p>
+          <a:p>
+            <a:pPr>
+              <a:spcAft>
+                <a:spcPts val="600"/>
+              </a:spcAft>
+            </a:pPr>
+            <a:r>
+              <a:rPr sz="1500">
+                <a:solidFill>
+                  <a:srgbClr val="22282E"/>
+                </a:solidFill>
+              </a:rPr>
+              <a:t>•  ATT&amp;CK Navigator para la matriz de cobertura.</a:t>
+            </a:r>
+          </a:p>
+          <a:p>
+            <a:pPr>
+              <a:spcAft>
+                <a:spcPts val="600"/>
+              </a:spcAft>
+            </a:pPr>
+            <a:r>
+              <a:rPr sz="1500">
+                <a:solidFill>
+                  <a:srgbClr val="22282E"/>
+                </a:solidFill>
+              </a:rPr>
+              <a:t>•  Las técnicas ofensivas de las clases anteriores como insumos a detectar.</a:t>
             </a:r>
           </a:p>
         </p:txBody>
@@ -4718,7 +5079,7 @@
                   <a:srgbClr val="0B3D2E"/>
                 </a:solidFill>
               </a:rPr>
-              <a:t>📝 Reto verificable</a:t>
+              <a:t>🧪 Laboratorio guiado</a:t>
             </a:r>
           </a:p>
         </p:txBody>
@@ -4756,22 +5117,97 @@
                   <a:srgbClr val="22282E"/>
                 </a:solidFill>
               </a:rPr>
-              <a:t>•  Ejecuta un ciclo purple completo sobre al menos 3 técnicas de esta parte: demuestra que inicialmente no se detectaban (o se detectaban mal) y que tras afinar reglas quedan cubiertas, reflejándolo en un layer de Navigator.</a:t>
-            </a:r>
-          </a:p>
-          <a:p>
-            <a:pPr>
-              <a:spcAft>
-                <a:spcPts val="600"/>
-              </a:spcAft>
-            </a:pPr>
-            <a:r>
-              <a:rPr sz="1500">
-                <a:solidFill>
-                  <a:srgbClr val="22282E"/>
-                </a:solidFill>
-              </a:rPr>
-              <a:t>•  Criterio de aceptación: para cada técnica presentas la ejecución, la observación en el SIEM, la regla creada/afinada y la reejecución que confirma la detección; el layer de Navigator muestra las 3 técnicas en verde con comentario.</a:t>
+              <a:t>•  Prepara la instrumentación. Instala Sysmon con una config robusta y envía eventos a tu SIEM; verifica que llegan.</a:t>
+            </a:r>
+          </a:p>
+          <a:p>
+            <a:pPr>
+              <a:spcAft>
+                <a:spcPts val="600"/>
+              </a:spcAft>
+            </a:pPr>
+            <a:r>
+              <a:rPr sz="1500">
+                <a:solidFill>
+                  <a:srgbClr val="22282E"/>
+                </a:solidFill>
+              </a:rPr>
+              <a:t>•  Elige un TTP. Toma Kerberoasting (T1558.003) de la Clase 171.</a:t>
+            </a:r>
+          </a:p>
+          <a:p>
+            <a:pPr>
+              <a:spcAft>
+                <a:spcPts val="600"/>
+              </a:spcAft>
+            </a:pPr>
+            <a:r>
+              <a:rPr sz="1500">
+                <a:solidFill>
+                  <a:srgbClr val="22282E"/>
+                </a:solidFill>
+              </a:rPr>
+              <a:t>•  Ejecuta y observa (ronda 1). Lanza el ataque y busca en el SIEM el evento 4769 con etype RC4; comprueba si existe una regla que alerte.</a:t>
+            </a:r>
+          </a:p>
+          <a:p>
+            <a:pPr>
+              <a:spcAft>
+                <a:spcPts val="600"/>
+              </a:spcAft>
+            </a:pPr>
+            <a:r>
+              <a:rPr sz="1500">
+                <a:solidFill>
+                  <a:srgbClr val="22282E"/>
+                </a:solidFill>
+              </a:rPr>
+              <a:t>•  Ajusta la detección. Escribe/afina una regla que alerte ante múltiples 4769 RC4 en poco tiempo desde un mismo origen.</a:t>
+            </a:r>
+          </a:p>
+          <a:p>
+            <a:pPr>
+              <a:spcAft>
+                <a:spcPts val="600"/>
+              </a:spcAft>
+            </a:pPr>
+            <a:r>
+              <a:rPr sz="1500">
+                <a:solidFill>
+                  <a:srgbClr val="22282E"/>
+                </a:solidFill>
+              </a:rPr>
+              <a:t>•  Reejecuta (ronda 2). Vuelve a lanzar Kerberoasting y confirma que ahora sí dispara la alerta; reduce falsos positivos si aparecen.</a:t>
+            </a:r>
+          </a:p>
+          <a:p>
+            <a:pPr>
+              <a:spcAft>
+                <a:spcPts val="600"/>
+              </a:spcAft>
+            </a:pPr>
+            <a:r>
+              <a:rPr sz="1500">
+                <a:solidFill>
+                  <a:srgbClr val="22282E"/>
+                </a:solidFill>
+              </a:rPr>
+              <a:t>•  Mide cobertura. En Navigator, marca el TTP como "detectado" (verde) y repite el ciclo con 2–3 técnicas más (PtH, DCSync).</a:t>
+            </a:r>
+          </a:p>
+          <a:p>
+            <a:pPr>
+              <a:spcAft>
+                <a:spcPts val="600"/>
+              </a:spcAft>
+            </a:pPr>
+            <a:r>
+              <a:rPr sz="1500">
+                <a:solidFill>
+                  <a:srgbClr val="22282E"/>
+                </a:solidFill>
+              </a:rPr>
+              <a:t>•  Documenta. Registra por técnica: qué se ejecutó, qué se observó, la regla creada y el estado de cobertura.</a:t>
             </a:r>
           </a:p>
         </p:txBody>
